--- a/dv-lec2-matplotlib.pptx
+++ b/dv-lec2-matplotlib.pptx
@@ -234,7 +234,7 @@
           <a:p>
             <a:fld id="{9AB1A8E5-CDF1-4F51-925F-863258DF532F}" type="datetimeFigureOut">
               <a:rPr lang="ru-RU" smtClean="0"/>
-              <a:t>05.04.2024</a:t>
+              <a:t>26.09.2024</a:t>
             </a:fld>
             <a:endParaRPr lang="ru-RU"/>
           </a:p>
@@ -5815,7 +5815,7 @@
           <a:p>
             <a:fld id="{CE8FAAA5-A14A-44C9-AE63-B0B7E46459D5}" type="datetimeFigureOut">
               <a:rPr lang="ru-RU" smtClean="0"/>
-              <a:t>05.04.2024</a:t>
+              <a:t>26.09.2024</a:t>
             </a:fld>
             <a:endParaRPr lang="ru-RU"/>
           </a:p>
@@ -5983,7 +5983,7 @@
           <a:p>
             <a:fld id="{CE8FAAA5-A14A-44C9-AE63-B0B7E46459D5}" type="datetimeFigureOut">
               <a:rPr lang="ru-RU" smtClean="0"/>
-              <a:t>05.04.2024</a:t>
+              <a:t>26.09.2024</a:t>
             </a:fld>
             <a:endParaRPr lang="ru-RU"/>
           </a:p>
@@ -6161,7 +6161,7 @@
           <a:p>
             <a:fld id="{CE8FAAA5-A14A-44C9-AE63-B0B7E46459D5}" type="datetimeFigureOut">
               <a:rPr lang="ru-RU" smtClean="0"/>
-              <a:t>05.04.2024</a:t>
+              <a:t>26.09.2024</a:t>
             </a:fld>
             <a:endParaRPr lang="ru-RU"/>
           </a:p>
@@ -6475,7 +6475,7 @@
           <a:p>
             <a:fld id="{CE8FAAA5-A14A-44C9-AE63-B0B7E46459D5}" type="datetimeFigureOut">
               <a:rPr lang="ru-RU" smtClean="0"/>
-              <a:t>05.04.2024</a:t>
+              <a:t>26.09.2024</a:t>
             </a:fld>
             <a:endParaRPr lang="ru-RU"/>
           </a:p>
@@ -6720,7 +6720,7 @@
           <a:p>
             <a:fld id="{CE8FAAA5-A14A-44C9-AE63-B0B7E46459D5}" type="datetimeFigureOut">
               <a:rPr lang="ru-RU" smtClean="0"/>
-              <a:t>05.04.2024</a:t>
+              <a:t>26.09.2024</a:t>
             </a:fld>
             <a:endParaRPr lang="ru-RU"/>
           </a:p>
@@ -7005,7 +7005,7 @@
           <a:p>
             <a:fld id="{CE8FAAA5-A14A-44C9-AE63-B0B7E46459D5}" type="datetimeFigureOut">
               <a:rPr lang="ru-RU" smtClean="0"/>
-              <a:t>05.04.2024</a:t>
+              <a:t>26.09.2024</a:t>
             </a:fld>
             <a:endParaRPr lang="ru-RU"/>
           </a:p>
@@ -7424,7 +7424,7 @@
           <a:p>
             <a:fld id="{CE8FAAA5-A14A-44C9-AE63-B0B7E46459D5}" type="datetimeFigureOut">
               <a:rPr lang="ru-RU" smtClean="0"/>
-              <a:t>05.04.2024</a:t>
+              <a:t>26.09.2024</a:t>
             </a:fld>
             <a:endParaRPr lang="ru-RU"/>
           </a:p>
@@ -7541,7 +7541,7 @@
           <a:p>
             <a:fld id="{CE8FAAA5-A14A-44C9-AE63-B0B7E46459D5}" type="datetimeFigureOut">
               <a:rPr lang="ru-RU" smtClean="0"/>
-              <a:t>05.04.2024</a:t>
+              <a:t>26.09.2024</a:t>
             </a:fld>
             <a:endParaRPr lang="ru-RU"/>
           </a:p>
@@ -7636,7 +7636,7 @@
           <a:p>
             <a:fld id="{CE8FAAA5-A14A-44C9-AE63-B0B7E46459D5}" type="datetimeFigureOut">
               <a:rPr lang="ru-RU" smtClean="0"/>
-              <a:t>05.04.2024</a:t>
+              <a:t>26.09.2024</a:t>
             </a:fld>
             <a:endParaRPr lang="ru-RU"/>
           </a:p>
@@ -7911,7 +7911,7 @@
           <a:p>
             <a:fld id="{CE8FAAA5-A14A-44C9-AE63-B0B7E46459D5}" type="datetimeFigureOut">
               <a:rPr lang="ru-RU" smtClean="0"/>
-              <a:t>05.04.2024</a:t>
+              <a:t>26.09.2024</a:t>
             </a:fld>
             <a:endParaRPr lang="ru-RU"/>
           </a:p>
@@ -8163,7 +8163,7 @@
           <a:p>
             <a:fld id="{CE8FAAA5-A14A-44C9-AE63-B0B7E46459D5}" type="datetimeFigureOut">
               <a:rPr lang="ru-RU" smtClean="0"/>
-              <a:t>05.04.2024</a:t>
+              <a:t>26.09.2024</a:t>
             </a:fld>
             <a:endParaRPr lang="ru-RU"/>
           </a:p>
@@ -8383,7 +8383,7 @@
           <a:p>
             <a:fld id="{CE8FAAA5-A14A-44C9-AE63-B0B7E46459D5}" type="datetimeFigureOut">
               <a:rPr lang="ru-RU" smtClean="0"/>
-              <a:t>05.04.2024</a:t>
+              <a:t>26.09.2024</a:t>
             </a:fld>
             <a:endParaRPr lang="ru-RU"/>
           </a:p>
@@ -19093,7 +19093,7 @@
         </p:blipFill>
         <p:spPr bwMode="auto">
           <a:xfrm>
-            <a:off x="3581400" y="5486400"/>
+            <a:off x="3563888" y="5448300"/>
             <a:ext cx="5486400" cy="1219200"/>
           </a:xfrm>
           <a:prstGeom prst="rect">
